--- a/curso/pptx/S63.pptx
+++ b/curso/pptx/S63.pptx
@@ -5551,7 +5551,7 @@
                 </a:solidFill>
                 <a:latin typeface="Nunito Sans"/>
               </a:rPr>
-              <a:t>Lo mínimo, por las dos partes: </a:t>
+              <a:t>双方最起码要做到：</a:t>
             </a:r>
             <a:r>
               <a:rPr sz="2800" b="1">
@@ -5560,7 +5560,7 @@
                 </a:solidFill>
                 <a:latin typeface="Nunito Sans"/>
               </a:rPr>
-              <a:t>querer escuchar</a:t>
+              <a:t>愿意倾听</a:t>
             </a:r>
             <a:r>
               <a:rPr sz="2800" b="0">
@@ -5569,7 +5569,7 @@
                 </a:solidFill>
                 <a:latin typeface="Nunito Sans"/>
               </a:rPr>
-              <a:t> y </a:t>
+              <a:t>和</a:t>
             </a:r>
             <a:r>
               <a:rPr sz="2800" b="1">
@@ -5578,7 +5578,7 @@
                 </a:solidFill>
                 <a:latin typeface="Nunito Sans"/>
               </a:rPr>
-              <a:t>dar razones</a:t>
+              <a:t>给出理由</a:t>
             </a:r>
             <a:r>
               <a:rPr sz="2800" b="0">
@@ -5587,7 +5587,7 @@
                 </a:solidFill>
                 <a:latin typeface="Nunito Sans"/>
               </a:rPr>
-              <a:t>.</a:t>
+              <a:t>。</a:t>
             </a:r>
           </a:p>
           <a:p>
@@ -5612,7 +5612,7 @@
                 </a:solidFill>
                 <a:latin typeface="Nunito Sans"/>
               </a:rPr>
-              <a:t>Si el otro solo ataca, tú puedes no atacar, pero no hay diálogo.</a:t>
+              <a:t>如果对方只会攻击，你可以不攻击，但这就没有对话了。</a:t>
             </a:r>
           </a:p>
           <a:p>
@@ -5637,7 +5637,7 @@
                 </a:solidFill>
                 <a:latin typeface="Nunito Sans"/>
               </a:rPr>
-              <a:t>A veces lo mejor es parar y seguir en otro momento.</a:t>
+              <a:t>有时最好的办法是先停下来，改天再继续。</a:t>
             </a:r>
           </a:p>
         </p:txBody>
@@ -7340,7 +7340,7 @@
                 </a:solidFill>
                 <a:latin typeface="Nunito Sans"/>
               </a:rPr>
-              <a:t>Escuchar de verdad:</a:t>
+              <a:t>真正地倾听：</a:t>
             </a:r>
             <a:r>
               <a:rPr sz="2800" b="0">
@@ -7349,7 +7349,7 @@
                 </a:solidFill>
                 <a:latin typeface="Nunito Sans"/>
               </a:rPr>
-              <a:t> poder repetir lo que dice el otro.</a:t>
+              <a:t>能重述对方说的话。</a:t>
             </a:r>
           </a:p>
           <a:p>
@@ -7374,7 +7374,7 @@
                 </a:solidFill>
                 <a:latin typeface="Nunito Sans"/>
               </a:rPr>
-              <a:t>Dar razones, no gritar:</a:t>
+              <a:t>给出理由，不要大喊：</a:t>
             </a:r>
             <a:r>
               <a:rPr sz="2800" b="0">
@@ -7383,7 +7383,7 @@
                 </a:solidFill>
                 <a:latin typeface="Nunito Sans"/>
               </a:rPr>
-              <a:t> cuenta el mejor argumento, no la voz más alta.</a:t>
+              <a:t>算数的是最好的论证，不是最大的嗓门。</a:t>
             </a:r>
           </a:p>
           <a:p>
@@ -7408,7 +7408,7 @@
                 </a:solidFill>
                 <a:latin typeface="Nunito Sans"/>
               </a:rPr>
-              <a:t>Responder a la mejor versión</a:t>
+              <a:t>回应对方最好的说法</a:t>
             </a:r>
             <a:r>
               <a:rPr sz="2800" b="0">
@@ -7417,7 +7417,7 @@
                 </a:solidFill>
                 <a:latin typeface="Nunito Sans"/>
               </a:rPr>
-              <a:t> de lo que dice el otro （第58课）.</a:t>
+              <a:t>（第58课）。</a:t>
             </a:r>
           </a:p>
           <a:p>
@@ -7442,7 +7442,7 @@
                 </a:solidFill>
                 <a:latin typeface="Nunito Sans"/>
               </a:rPr>
-              <a:t>Criticar la idea, no la persona</a:t>
+              <a:t>批评想法，不批评人</a:t>
             </a:r>
             <a:r>
               <a:rPr sz="2800" b="0">
@@ -7451,7 +7451,7 @@
                 </a:solidFill>
                 <a:latin typeface="Nunito Sans"/>
               </a:rPr>
-              <a:t> （第14课）.</a:t>
+              <a:t>（第14课）。</a:t>
             </a:r>
           </a:p>
           <a:p>
@@ -7476,7 +7476,7 @@
                 </a:solidFill>
                 <a:latin typeface="Nunito Sans"/>
               </a:rPr>
-              <a:t>Poder cambiar de idea</a:t>
+              <a:t>有更好的理由时，可以改变想法</a:t>
             </a:r>
             <a:r>
               <a:rPr sz="2800" b="0">
@@ -7485,7 +7485,7 @@
                 </a:solidFill>
                 <a:latin typeface="Nunito Sans"/>
               </a:rPr>
-              <a:t> si hay razones mejores （第57课）.</a:t>
+              <a:t>（第57课）。</a:t>
             </a:r>
           </a:p>
         </p:txBody>
@@ -7719,7 +7719,7 @@
                 </a:solidFill>
                 <a:latin typeface="Nunito Sans"/>
               </a:rPr>
-              <a:t>No estar de acuerdo es </a:t>
+              <a:t>不同意是</a:t>
             </a:r>
             <a:r>
               <a:rPr sz="2800" b="1">
@@ -7728,7 +7728,7 @@
                 </a:solidFill>
                 <a:latin typeface="Nunito Sans"/>
               </a:rPr>
-              <a:t>normal</a:t>
+              <a:t>正常的</a:t>
             </a:r>
             <a:r>
               <a:rPr sz="2800" b="0">
@@ -7737,7 +7737,7 @@
                 </a:solidFill>
                 <a:latin typeface="Nunito Sans"/>
               </a:rPr>
-              <a:t>: no es una pelea</a:t>
+              <a:t>：这不是吵架</a:t>
             </a:r>
           </a:p>
           <a:p>
@@ -7762,7 +7762,7 @@
                 </a:solidFill>
                 <a:latin typeface="Nunito Sans"/>
               </a:rPr>
-              <a:t>Se critica la </a:t>
+              <a:t>批评的是</a:t>
             </a:r>
             <a:r>
               <a:rPr sz="2800" b="1">
@@ -7771,7 +7771,7 @@
                 </a:solidFill>
                 <a:latin typeface="Nunito Sans"/>
               </a:rPr>
-              <a:t>idea</a:t>
+              <a:t>想法</a:t>
             </a:r>
             <a:r>
               <a:rPr sz="2800" b="0">
@@ -7780,7 +7780,7 @@
                 </a:solidFill>
                 <a:latin typeface="Nunito Sans"/>
               </a:rPr>
-              <a:t>, con razones</a:t>
+              <a:t>，并且要有理由</a:t>
             </a:r>
           </a:p>
           <a:p>
@@ -7805,7 +7805,7 @@
                 </a:solidFill>
                 <a:latin typeface="Nunito Sans"/>
               </a:rPr>
-              <a:t>A la persona se la respeta, piense lo que piense</a:t>
+              <a:t>对人要尊重，不管他怎么想</a:t>
             </a:r>
           </a:p>
         </p:txBody>

--- a/curso/pptx/S63.pptx
+++ b/curso/pptx/S63.pptx
@@ -4130,7 +4130,7 @@
                 </a:solidFill>
                 <a:latin typeface="Nunito Sans"/>
               </a:rPr>
-              <a:t>凯文：“电子游戏应该有时间限制。”艾托尔：“你这么说是因为你游戏玩得烂透了。”</a:t>
+              <a:t>一个男孩：“电子游戏应该有时间限制。”一个同学：“你这么说是因为你游戏玩得烂透了。”</a:t>
             </a:r>
           </a:p>
         </p:txBody>
@@ -4178,7 +4178,7 @@
                 </a:solidFill>
                 <a:latin typeface="Nunito Sans"/>
               </a:rPr>
-              <a:t>艾托尔攻击的是凯文，而不是他的想法：这是人身攻击（第14课）。</a:t>
+              <a:t>这个同学攻击的是那个男孩，而不是他的想法：这是人身攻击（第14课）。</a:t>
             </a:r>
           </a:p>
           <a:p>
@@ -4203,7 +4203,7 @@
                 </a:solidFill>
                 <a:latin typeface="Nunito Sans"/>
               </a:rPr>
-              <a:t>如果不攻击，艾托尔可以说：“我不这么看：我更希望每个家庭自己决定限制。”</a:t>
+              <a:t>如果不攻击，这个同学可以说：“我不这么看：我更希望每个家庭自己决定限制。”</a:t>
             </a:r>
           </a:p>
           <a:p>
@@ -4228,7 +4228,7 @@
                 </a:solidFill>
                 <a:latin typeface="Nunito Sans"/>
               </a:rPr>
-              <a:t>现在有了一个凯文可以思考和回应的理由。</a:t>
+              <a:t>现在有了一个那个男孩可以思考和回应的理由。</a:t>
             </a:r>
           </a:p>
           <a:p>
@@ -4439,7 +4439,7 @@
                 </a:solidFill>
                 <a:latin typeface="Nunito Sans"/>
               </a:rPr>
-              <a:t>伊克尔：“周六我们去看新电影。”娜亚拉：“你看，要到下周五才上映。”伊克尔去核实了：“你说得对。那去保龄球馆怎么样？”</a:t>
+              <a:t>一个男孩：“周六我们去看新电影。”一个女孩：“你看，要到下周五才上映。”这个男孩去核实了：“你说得对。那去保龄球馆怎么样？”</a:t>
             </a:r>
           </a:p>
         </p:txBody>
@@ -4487,7 +4487,7 @@
                 </a:solidFill>
                 <a:latin typeface="Nunito Sans"/>
               </a:rPr>
-              <a:t>娜亚拉没有攻击：她纠正了一个数据，并给出了一个可以核实的理由。</a:t>
+              <a:t>这个女孩没有攻击：她纠正了一个数据，并给出了一个可以核实的理由。</a:t>
             </a:r>
           </a:p>
           <a:p>
@@ -4512,7 +4512,7 @@
                 </a:solidFill>
                 <a:latin typeface="Nunito Sans"/>
               </a:rPr>
-              <a:t>伊克尔核实后改变了想法。</a:t>
+              <a:t>这个男孩核实后改变了想法。</a:t>
             </a:r>
           </a:p>
           <a:p>
@@ -4537,7 +4537,7 @@
                 </a:solidFill>
                 <a:latin typeface="Nunito Sans"/>
               </a:rPr>
-              <a:t>伊克尔输了吗？没有：现在他知道了以前不知道的事。</a:t>
+              <a:t>这个男孩输了吗？没有：现在他知道了以前不知道的事。</a:t>
             </a:r>
           </a:p>
           <a:p>
@@ -4748,7 +4748,7 @@
                 </a:solidFill>
                 <a:latin typeface="Nunito Sans"/>
               </a:rPr>
-              <a:t>陈提议骑自行车去海滩。迈亚伦：“我不太赞成：要骑一个多小时，我们约好的是半小时。”陈：“你总是攻击我！”</a:t>
+              <a:t>一个男孩提议骑自行车去海滩。一个女孩：“我不太赞成：要骑一个多小时，我们约好的是半小时。”这个男孩：“你总是攻击我！”</a:t>
             </a:r>
           </a:p>
         </p:txBody>
@@ -4796,7 +4796,7 @@
                 </a:solidFill>
                 <a:latin typeface="Nunito Sans"/>
               </a:rPr>
-              <a:t>陈觉得自己被攻击了。迈亚伦攻击他了吗？</a:t>
+              <a:t>这个男孩觉得自己被攻击了。这个女孩攻击他了吗？</a:t>
             </a:r>
           </a:p>
           <a:p>
@@ -4821,7 +4821,7 @@
                 </a:solidFill>
                 <a:latin typeface="Nunito Sans"/>
               </a:rPr>
-              <a:t>看起来是这样：迈亚伦说她不太赞成陈的计划。</a:t>
+              <a:t>看起来是这样：这个女孩说她不太赞成这个男孩的计划。</a:t>
             </a:r>
           </a:p>
           <a:p>
@@ -4846,7 +4846,7 @@
                 </a:solidFill>
                 <a:latin typeface="Nunito Sans"/>
               </a:rPr>
-              <a:t>但她说的是什么？是计划和时间，不是陈这个人怎么样。</a:t>
+              <a:t>但她说的是什么？是计划和时间，不是这个男孩这个人怎么样。</a:t>
             </a:r>
           </a:p>
           <a:p>
